--- a/carpentry/intake-142/PowerPoint/Day-22_2026-12-04_Week-6.pptx
+++ b/carpentry/intake-142/PowerPoint/Day-22_2026-12-04_Week-6.pptx
@@ -776,7 +776,7 @@
           <a:p/>
           <a:p>
             <a:r>
-              <a:t>A ramp drawing might describe its slope as a percentage, while a brace drawing might label an angle. We need to understand what each number means before using it. Our goal is to find angles from two known sides and to report grade and degrees separately. Read pages 207–209 with the triangle in view. What two measurements define a rise/run slope? Vertical rise and horizontal run. The sloping surface length is a different side and must not silently replace the run.</a:t>
+              <a:t>A ramp drawing might describe its slope as a percentage, while a brace drawing might label an angle. We need to understand what each number means before using it. Our goal is to find angles from two known sides and to report grade and degrees separately. Read pages 331–333 with the triangle in view. What two measurements define a rise/run slope? Vertical rise and horizontal run. The sloping surface length is a different side and must not silently replace the run.</a:t>
             </a:r>
           </a:p>
         </p:txBody>
@@ -1080,7 +1080,7 @@
           <a:p/>
           <a:p>
             <a:r>
-              <a:t>Follow Example 13.7 on page 209 from the drawing to the rise/run ratio. Locate the horizontal run, not the sloping length. Copy the ratio first, then branch into two calculations: multiply by one hundred for percentage grade, and apply inverse tangent for degrees. What part of the working should be identical in both branches? The consistent-unit rise/run ratio. If two answers disagree with the example, inspect that shared input first. A correct function applied to a reversed run/rise ratio still describes a different angle.</a:t>
+              <a:t>Follow Example 13.7 on page 333 from the drawing to the rise/run ratio. Locate the horizontal run, not the sloping length. Copy the ratio first, then branch into two calculations: multiply by one hundred for percentage grade, and apply inverse tangent for degrees. What part of the working should be identical in both branches? The consistent-unit rise/run ratio. If two answers disagree with the example, inspect that shared input first. A correct function applied to a reversed run/rise ratio still describes a different angle.</a:t>
             </a:r>
           </a:p>
         </p:txBody>
@@ -3647,7 +3647,7 @@
                 </a:solidFill>
                 <a:latin typeface="Arial"/>
               </a:rPr>
-              <a:t>Textbook sections 13.4–13.5 pp.207–209; sections 13.7 pp.213–214 (extension)</a:t>
+              <a:t>Textbook sections 13.4–13.5 pp.331–333; sections 13.7 pp.337–339 (extension)</a:t>
             </a:r>
           </a:p>
         </p:txBody>
@@ -4405,7 +4405,7 @@
                 </a:solidFill>
                 <a:latin typeface="Arial"/>
               </a:rPr>
-              <a:t>Textbook sections 13.4–13.5 pp.207–209; sections 13.7 pp.213–214 (extension)</a:t>
+              <a:t>Textbook sections 13.4–13.5 pp.331–333; sections 13.7 pp.337–339 (extension)</a:t>
             </a:r>
           </a:p>
         </p:txBody>
@@ -4605,7 +4605,7 @@
                 </a:solidFill>
                 <a:latin typeface="Arial"/>
               </a:rPr>
-              <a:t>Resources: Exercise Book 13A Q10–15 (p.82); 13B Q7 (p.83), Q12 (p.84)</a:t>
+              <a:t>Resources: Exercise Book 13A Q10–15 (p.128); 13B Q7 (p.129), Q12 (p.130)</a:t>
             </a:r>
           </a:p>
         </p:txBody>
@@ -5219,7 +5219,7 @@
                 </a:solidFill>
                 <a:latin typeface="Arial"/>
               </a:rPr>
-              <a:t>Textbook sections 13.4–13.5 pp.207–209; sections 13.7 pp.213–214 (extension)</a:t>
+              <a:t>Textbook sections 13.4–13.5 pp.331–333; sections 13.7 pp.337–339 (extension)</a:t>
             </a:r>
           </a:p>
         </p:txBody>
@@ -5975,7 +5975,7 @@
                 </a:solidFill>
                 <a:latin typeface="Arial"/>
               </a:rPr>
-              <a:t>Textbook sections 13.4–13.5 pp.207–209; sections 13.7 pp.213–214 (extension)</a:t>
+              <a:t>Textbook sections 13.4–13.5 pp.331–333; sections 13.7 pp.337–339 (extension)</a:t>
             </a:r>
           </a:p>
         </p:txBody>
@@ -6757,7 +6757,7 @@
                 </a:solidFill>
                 <a:latin typeface="Arial"/>
               </a:rPr>
-              <a:t>Textbook sections 13.4–13.5 pp.207–209; sections 13.7 pp.213–214 (extension)</a:t>
+              <a:t>Textbook sections 13.4–13.5 pp.331–333; sections 13.7 pp.337–339 (extension)</a:t>
             </a:r>
           </a:p>
         </p:txBody>
@@ -6957,7 +6957,7 @@
                 </a:solidFill>
                 <a:latin typeface="Arial"/>
               </a:rPr>
-              <a:t>Resources: Exercise Book 13A Q10–15 (p.82); 13B Q7 (p.83), Q12 (p.84)</a:t>
+              <a:t>Resources: Exercise Book 13A Q10–15 (p.128); 13B Q7 (p.129), Q12 (p.130)</a:t>
             </a:r>
           </a:p>
         </p:txBody>
@@ -7571,7 +7571,7 @@
                 </a:solidFill>
                 <a:latin typeface="Arial"/>
               </a:rPr>
-              <a:t>Textbook sections 13.4–13.5 pp.207–209; sections 13.7 pp.213–214 (extension)</a:t>
+              <a:t>Textbook sections 13.4–13.5 pp.331–333; sections 13.7 pp.337–339 (extension)</a:t>
             </a:r>
           </a:p>
         </p:txBody>
@@ -8347,7 +8347,7 @@
                 </a:solidFill>
                 <a:latin typeface="Arial"/>
               </a:rPr>
-              <a:t>Textbook sections 13.4–13.5 pp.207–209; sections 13.7 pp.213–214 (extension)</a:t>
+              <a:t>Textbook sections 13.4–13.5 pp.331–333; sections 13.7 pp.337–339 (extension)</a:t>
             </a:r>
           </a:p>
         </p:txBody>
@@ -9306,7 +9306,7 @@
                 </a:solidFill>
                 <a:latin typeface="Arial"/>
               </a:rPr>
-              <a:t>Textbook sections 13.4–13.5 pp.207–209; sections 13.7 pp.213–214 (extension)</a:t>
+              <a:t>Textbook sections 13.4–13.5 pp.331–333; sections 13.7 pp.337–339 (extension)</a:t>
             </a:r>
           </a:p>
         </p:txBody>
@@ -10017,7 +10017,7 @@
                 </a:solidFill>
                 <a:latin typeface="Arial"/>
               </a:rPr>
-              <a:t>Textbook sections 13.4–13.5 pp.207–209; sections 13.7 pp.213–214 (extension)</a:t>
+              <a:t>Textbook sections 13.4–13.5 pp.331–333; sections 13.7 pp.337–339 (extension)</a:t>
             </a:r>
           </a:p>
         </p:txBody>
@@ -10728,7 +10728,7 @@
                 </a:solidFill>
                 <a:latin typeface="Arial"/>
               </a:rPr>
-              <a:t>Textbook sections 13.4–13.5 pp.207–209; sections 13.7 pp.213–214 (extension)</a:t>
+              <a:t>Textbook sections 13.4–13.5 pp.331–333; sections 13.7 pp.337–339 (extension)</a:t>
             </a:r>
           </a:p>
         </p:txBody>
@@ -10928,7 +10928,7 @@
                 </a:solidFill>
                 <a:latin typeface="Arial"/>
               </a:rPr>
-              <a:t>Resources: Exercise Book 13A Q10–15 (p.82); 13B Q7 (p.83), Q12 (p.84)</a:t>
+              <a:t>Resources: Exercise Book 13A Q10–15 (p.128); 13B Q7 (p.129), Q12 (p.130)</a:t>
             </a:r>
           </a:p>
         </p:txBody>
@@ -13525,7 +13525,7 @@
                 </a:solidFill>
                 <a:latin typeface="Arial"/>
               </a:rPr>
-              <a:t>Textbook sections 13.4–13.5 pp.207–209; sections 13.7 pp.213–214 (extension)</a:t>
+              <a:t>Textbook sections 13.4–13.5 pp.331–333; sections 13.7 pp.337–339 (extension)</a:t>
             </a:r>
           </a:p>
         </p:txBody>
@@ -14236,7 +14236,7 @@
                 </a:solidFill>
                 <a:latin typeface="Arial"/>
               </a:rPr>
-              <a:t>Textbook sections 13.4–13.5 pp.207–209; sections 13.7 pp.213–214 (extension)</a:t>
+              <a:t>Textbook sections 13.4–13.5 pp.331–333; sections 13.7 pp.337–339 (extension)</a:t>
             </a:r>
           </a:p>
         </p:txBody>
@@ -14947,7 +14947,7 @@
                 </a:solidFill>
                 <a:latin typeface="Arial"/>
               </a:rPr>
-              <a:t>Textbook sections 13.4–13.5 pp.207–209; sections 13.7 pp.213–214 (extension)</a:t>
+              <a:t>Textbook sections 13.4–13.5 pp.331–333; sections 13.7 pp.337–339 (extension)</a:t>
             </a:r>
           </a:p>
         </p:txBody>
@@ -15147,7 +15147,7 @@
                 </a:solidFill>
                 <a:latin typeface="Arial"/>
               </a:rPr>
-              <a:t>Resources: Exercise Book 13A Q10–15 (p.82); 13B Q7 (p.83), Q12 (p.84)</a:t>
+              <a:t>Resources: Exercise Book 13A Q10–15 (p.128); 13B Q7 (p.129), Q12 (p.130)</a:t>
             </a:r>
           </a:p>
         </p:txBody>
@@ -15716,7 +15716,7 @@
                 </a:solidFill>
                 <a:latin typeface="Arial"/>
               </a:rPr>
-              <a:t>Textbook sections 13.4–13.5 pp.207–209; sections 13.7 pp.213–214 (extension)</a:t>
+              <a:t>Textbook sections 13.4–13.5 pp.331–333; sections 13.7 pp.337–339 (extension)</a:t>
             </a:r>
           </a:p>
         </p:txBody>
@@ -15916,7 +15916,7 @@
                 </a:solidFill>
                 <a:latin typeface="Arial"/>
               </a:rPr>
-              <a:t>Textbook sections 13.4–13.5 pp.207–209; sections 13.7 pp.213–214 (extension)</a:t>
+              <a:t>Textbook sections 13.4–13.5 pp.331–333; sections 13.7 pp.337–339 (extension)</a:t>
             </a:r>
           </a:p>
         </p:txBody>
@@ -15964,7 +15964,7 @@
                 </a:solidFill>
                 <a:latin typeface="Arial"/>
               </a:rPr>
-              <a:t>Exercise Book 13A Q10–15 (p.82); 13B Q7 (p.83), Q12 (p.84)</a:t>
+              <a:t>Exercise Book 13A Q10–15 (p.128); 13B Q7 (p.129), Q12 (p.130)</a:t>
             </a:r>
           </a:p>
         </p:txBody>
@@ -16626,7 +16626,7 @@
                 </a:solidFill>
                 <a:latin typeface="Arial"/>
               </a:rPr>
-              <a:t>Textbook sections 13.4–13.5 pp.207–209; sections 13.7 pp.213–214 (extension)</a:t>
+              <a:t>Textbook sections 13.4–13.5 pp.331–333; sections 13.7 pp.337–339 (extension)</a:t>
             </a:r>
           </a:p>
         </p:txBody>
@@ -16826,7 +16826,7 @@
                 </a:solidFill>
                 <a:latin typeface="Arial"/>
               </a:rPr>
-              <a:t>Resources: Exercise Book 13A Q10–15 (p.82); 13B Q7 (p.83), Q12 (p.84)</a:t>
+              <a:t>Resources: Exercise Book 13A Q10–15 (p.128); 13B Q7 (p.129), Q12 (p.130)</a:t>
             </a:r>
           </a:p>
         </p:txBody>
@@ -17575,7 +17575,7 @@
                 </a:solidFill>
                 <a:latin typeface="Arial"/>
               </a:rPr>
-              <a:t>Textbook sections 13.4–13.5 pp.207–209; sections 13.7 pp.213–214 (extension)</a:t>
+              <a:t>Textbook sections 13.4–13.5 pp.331–333; sections 13.7 pp.337–339 (extension)</a:t>
             </a:r>
           </a:p>
         </p:txBody>
@@ -18820,7 +18820,7 @@
                 </a:solidFill>
                 <a:latin typeface="Arial"/>
               </a:rPr>
-              <a:t>Textbook sections 13.4–13.5 pp.207–209; sections 13.7 pp.213–214 (extension)</a:t>
+              <a:t>Textbook sections 13.4–13.5 pp.331–333; sections 13.7 pp.337–339 (extension)</a:t>
             </a:r>
           </a:p>
         </p:txBody>
@@ -20162,7 +20162,7 @@
                 <a:ea typeface="Arial" pitchFamily="34" charset="-122"/>
                 <a:cs typeface="Arial" pitchFamily="34" charset="-120"/>
               </a:rPr>
-              <a:t>Textbook pp.207–209 • Numeracy Hub → Angles and Trig → Right-triangle trigonometry</a:t>
+              <a:t>Textbook pp.331–333 • Numeracy Hub → Angles and Trig → Right-triangle trigonometry</a:t>
             </a:r>
             <a:endParaRPr lang="en-US" sz="1050" dirty="0"/>
           </a:p>
@@ -20758,7 +20758,7 @@
                 </a:solidFill>
                 <a:latin typeface="Arial"/>
               </a:rPr>
-              <a:t>Textbook  |  page 209</a:t>
+              <a:t>Textbook  |  page 333</a:t>
             </a:r>
           </a:p>
         </p:txBody>
@@ -20806,7 +20806,7 @@
                 </a:solidFill>
                 <a:latin typeface="Arial"/>
               </a:rPr>
-              <a:t>Textbook sections 13.4–13.5 pp.207–209; sections 13.7 pp.213–214 (extension)</a:t>
+              <a:t>Textbook sections 13.4–13.5 pp.331–333; sections 13.7 pp.337–339 (extension)</a:t>
             </a:r>
           </a:p>
         </p:txBody>
@@ -20878,7 +20878,7 @@
                 </a:solidFill>
                 <a:latin typeface="Arial"/>
               </a:rPr>
-              <a:t>Textbook p.209 • Example 13.7 — Rise, run, angle and percentage grade</a:t>
+              <a:t>Textbook p.333 • Example 13.7 — Rise, run, angle and percentage grade</a:t>
             </a:r>
           </a:p>
         </p:txBody>
@@ -21444,7 +21444,7 @@
                 </a:solidFill>
                 <a:latin typeface="Arial"/>
               </a:rPr>
-              <a:t>Textbook  |  page 209</a:t>
+              <a:t>Textbook  |  page 333</a:t>
             </a:r>
           </a:p>
         </p:txBody>
@@ -21492,7 +21492,7 @@
                 </a:solidFill>
                 <a:latin typeface="Arial"/>
               </a:rPr>
-              <a:t>Textbook sections 13.4–13.5 pp.207–209; sections 13.7 pp.213–214 (extension)</a:t>
+              <a:t>Textbook sections 13.4–13.5 pp.331–333; sections 13.7 pp.337–339 (extension)</a:t>
             </a:r>
           </a:p>
         </p:txBody>
@@ -21564,7 +21564,7 @@
                 </a:solidFill>
                 <a:latin typeface="Arial"/>
               </a:rPr>
-              <a:t>Textbook p.209 • Example 13.7 — Inverse tangent and separate degree/percent answers</a:t>
+              <a:t>Textbook p.333 • Example 13.7 — Inverse tangent and separate degree/percent answers</a:t>
             </a:r>
           </a:p>
         </p:txBody>

--- a/carpentry/intake-142/PowerPoint/Day-22_2026-12-04_Week-6.pptx
+++ b/carpentry/intake-142/PowerPoint/Day-22_2026-12-04_Week-6.pptx
@@ -15416,6 +15416,104 @@
                 <a:latin typeface="Arial"/>
               </a:rPr>
               <a:t>Day 22  •  2026-12-04  •  22</a:t>
+            </a:r>
+          </a:p>
+        </p:txBody>
+      </p:sp>
+      <p:sp>
+        <p:nvSpPr>
+          <p:cNvPr id="22" name="Play quiz W06-L09"/>
+          <p:cNvSpPr txBox="1"/>
+          <p:nvPr/>
+        </p:nvSpPr>
+        <p:spPr>
+          <a:xfrm>
+            <a:off x="6355080" y="6606540"/>
+            <a:ext cx="822960" cy="210312"/>
+          </a:xfrm>
+          <a:prstGeom prst="rect">
+            <a:avLst/>
+          </a:prstGeom>
+          <a:noFill/>
+        </p:spPr>
+        <p:txBody>
+          <a:bodyPr wrap="square" lIns="0" rIns="0" tIns="0" bIns="0" anchor="t">
+            <a:normAutofit fontScale="100000" lnSpcReduction="0"/>
+          </a:bodyPr>
+          <a:lstStyle/>
+          <a:p>
+            <a:pPr>
+              <a:spcBef>
+                <a:spcPts val="0"/>
+              </a:spcBef>
+              <a:spcAft>
+                <a:spcPts val="0"/>
+              </a:spcAft>
+              <a:defRPr sz="1000" b="0">
+                <a:solidFill>
+                  <a:srgbClr val="D0002B"/>
+                </a:solidFill>
+                <a:latin typeface="Arial"/>
+              </a:defRPr>
+            </a:pPr>
+            <a:r>
+              <a:rPr sz="1000">
+                <a:solidFill>
+                  <a:srgbClr val="F7F8FC"/>
+                </a:solidFill>
+                <a:latin typeface="Arial"/>
+                <a:hlinkClick r:id="rId8"/>
+              </a:rPr>
+              <a:t>Play quiz</a:t>
+            </a:r>
+          </a:p>
+        </p:txBody>
+      </p:sp>
+      <p:sp>
+        <p:nvSpPr>
+          <p:cNvPr id="23" name="Quiz PDF W06-L09"/>
+          <p:cNvSpPr txBox="1"/>
+          <p:nvPr/>
+        </p:nvSpPr>
+        <p:spPr>
+          <a:xfrm>
+            <a:off x="7296912" y="6606540"/>
+            <a:ext cx="1005840" cy="210312"/>
+          </a:xfrm>
+          <a:prstGeom prst="rect">
+            <a:avLst/>
+          </a:prstGeom>
+          <a:noFill/>
+        </p:spPr>
+        <p:txBody>
+          <a:bodyPr wrap="square" lIns="0" rIns="0" tIns="0" bIns="0" anchor="t">
+            <a:normAutofit fontScale="100000" lnSpcReduction="0"/>
+          </a:bodyPr>
+          <a:lstStyle/>
+          <a:p>
+            <a:pPr>
+              <a:spcBef>
+                <a:spcPts val="0"/>
+              </a:spcBef>
+              <a:spcAft>
+                <a:spcPts val="0"/>
+              </a:spcAft>
+              <a:defRPr sz="1000" b="0">
+                <a:solidFill>
+                  <a:srgbClr val="D0002B"/>
+                </a:solidFill>
+                <a:latin typeface="Arial"/>
+              </a:defRPr>
+            </a:pPr>
+            <a:r>
+              <a:rPr sz="1000">
+                <a:solidFill>
+                  <a:srgbClr val="F7F8FC"/>
+                </a:solidFill>
+                <a:latin typeface="Arial"/>
+                <a:hlinkClick r:id="rId9"/>
+              </a:rPr>
+              <a:t>Quiz PDF</a:t>
             </a:r>
           </a:p>
         </p:txBody>
